--- a/你是我的一切_version2.pptx
+++ b/你是我的一切_version2.pptx
@@ -116,7 +116,7 @@
   </p:defaultTextStyle>
   <p:extLst>
     <p:ext uri="{EFAFB233-063F-42B5-8137-9DF3F51BA10A}">
-      <p15:sldGuideLst xmlns:p15="http://schemas.microsoft.com/office/powerpoint/2012/main"/>
+      <p15:sldGuideLst xmlns:p15="http://schemas.microsoft.com/office/powerpoint/2012/main" xmlns=""/>
     </p:ext>
   </p:extLst>
 </p:presentation>
@@ -303,7 +303,8 @@
           <a:p>
             <a:fld id="{D8F5507C-E303-491D-9BD5-658D9E88C63E}" type="datetimeFigureOut">
               <a:rPr lang="vi-VN" smtClean="0"/>
-              <a:t>06/07/2021</a:t>
+              <a:pPr/>
+              <a:t>20/08/2024</a:t>
             </a:fld>
             <a:endParaRPr lang="vi-VN"/>
           </a:p>
@@ -345,6 +346,7 @@
           <a:p>
             <a:fld id="{8A2132A0-C03C-4E0B-B580-F67C3BD9DEC7}" type="slidenum">
               <a:rPr lang="vi-VN" smtClean="0"/>
+              <a:pPr/>
               <a:t>‹#›</a:t>
             </a:fld>
             <a:endParaRPr lang="vi-VN"/>
@@ -354,7 +356,7 @@
     </p:spTree>
     <p:extLst>
       <p:ext uri="{BB962C8B-B14F-4D97-AF65-F5344CB8AC3E}">
-        <p14:creationId xmlns:p14="http://schemas.microsoft.com/office/powerpoint/2010/main" val="776534052"/>
+        <p14:creationId xmlns:p14="http://schemas.microsoft.com/office/powerpoint/2010/main" xmlns="" val="776534052"/>
       </p:ext>
     </p:extLst>
   </p:cSld>
@@ -473,7 +475,8 @@
           <a:p>
             <a:fld id="{D8F5507C-E303-491D-9BD5-658D9E88C63E}" type="datetimeFigureOut">
               <a:rPr lang="vi-VN" smtClean="0"/>
-              <a:t>06/07/2021</a:t>
+              <a:pPr/>
+              <a:t>20/08/2024</a:t>
             </a:fld>
             <a:endParaRPr lang="vi-VN"/>
           </a:p>
@@ -515,6 +518,7 @@
           <a:p>
             <a:fld id="{8A2132A0-C03C-4E0B-B580-F67C3BD9DEC7}" type="slidenum">
               <a:rPr lang="vi-VN" smtClean="0"/>
+              <a:pPr/>
               <a:t>‹#›</a:t>
             </a:fld>
             <a:endParaRPr lang="vi-VN"/>
@@ -524,7 +528,7 @@
     </p:spTree>
     <p:extLst>
       <p:ext uri="{BB962C8B-B14F-4D97-AF65-F5344CB8AC3E}">
-        <p14:creationId xmlns:p14="http://schemas.microsoft.com/office/powerpoint/2010/main" val="1809708303"/>
+        <p14:creationId xmlns:p14="http://schemas.microsoft.com/office/powerpoint/2010/main" xmlns="" val="1809708303"/>
       </p:ext>
     </p:extLst>
   </p:cSld>
@@ -653,7 +657,8 @@
           <a:p>
             <a:fld id="{D8F5507C-E303-491D-9BD5-658D9E88C63E}" type="datetimeFigureOut">
               <a:rPr lang="vi-VN" smtClean="0"/>
-              <a:t>06/07/2021</a:t>
+              <a:pPr/>
+              <a:t>20/08/2024</a:t>
             </a:fld>
             <a:endParaRPr lang="vi-VN"/>
           </a:p>
@@ -695,6 +700,7 @@
           <a:p>
             <a:fld id="{8A2132A0-C03C-4E0B-B580-F67C3BD9DEC7}" type="slidenum">
               <a:rPr lang="vi-VN" smtClean="0"/>
+              <a:pPr/>
               <a:t>‹#›</a:t>
             </a:fld>
             <a:endParaRPr lang="vi-VN"/>
@@ -704,7 +710,7 @@
     </p:spTree>
     <p:extLst>
       <p:ext uri="{BB962C8B-B14F-4D97-AF65-F5344CB8AC3E}">
-        <p14:creationId xmlns:p14="http://schemas.microsoft.com/office/powerpoint/2010/main" val="3307584999"/>
+        <p14:creationId xmlns:p14="http://schemas.microsoft.com/office/powerpoint/2010/main" xmlns="" val="3307584999"/>
       </p:ext>
     </p:extLst>
   </p:cSld>
@@ -823,7 +829,8 @@
           <a:p>
             <a:fld id="{D8F5507C-E303-491D-9BD5-658D9E88C63E}" type="datetimeFigureOut">
               <a:rPr lang="vi-VN" smtClean="0"/>
-              <a:t>06/07/2021</a:t>
+              <a:pPr/>
+              <a:t>20/08/2024</a:t>
             </a:fld>
             <a:endParaRPr lang="vi-VN"/>
           </a:p>
@@ -865,6 +872,7 @@
           <a:p>
             <a:fld id="{8A2132A0-C03C-4E0B-B580-F67C3BD9DEC7}" type="slidenum">
               <a:rPr lang="vi-VN" smtClean="0"/>
+              <a:pPr/>
               <a:t>‹#›</a:t>
             </a:fld>
             <a:endParaRPr lang="vi-VN"/>
@@ -874,7 +882,7 @@
     </p:spTree>
     <p:extLst>
       <p:ext uri="{BB962C8B-B14F-4D97-AF65-F5344CB8AC3E}">
-        <p14:creationId xmlns:p14="http://schemas.microsoft.com/office/powerpoint/2010/main" val="4183725378"/>
+        <p14:creationId xmlns:p14="http://schemas.microsoft.com/office/powerpoint/2010/main" xmlns="" val="4183725378"/>
       </p:ext>
     </p:extLst>
   </p:cSld>
@@ -1069,7 +1077,8 @@
           <a:p>
             <a:fld id="{D8F5507C-E303-491D-9BD5-658D9E88C63E}" type="datetimeFigureOut">
               <a:rPr lang="vi-VN" smtClean="0"/>
-              <a:t>06/07/2021</a:t>
+              <a:pPr/>
+              <a:t>20/08/2024</a:t>
             </a:fld>
             <a:endParaRPr lang="vi-VN"/>
           </a:p>
@@ -1111,6 +1120,7 @@
           <a:p>
             <a:fld id="{8A2132A0-C03C-4E0B-B580-F67C3BD9DEC7}" type="slidenum">
               <a:rPr lang="vi-VN" smtClean="0"/>
+              <a:pPr/>
               <a:t>‹#›</a:t>
             </a:fld>
             <a:endParaRPr lang="vi-VN"/>
@@ -1120,7 +1130,7 @@
     </p:spTree>
     <p:extLst>
       <p:ext uri="{BB962C8B-B14F-4D97-AF65-F5344CB8AC3E}">
-        <p14:creationId xmlns:p14="http://schemas.microsoft.com/office/powerpoint/2010/main" val="268289828"/>
+        <p14:creationId xmlns:p14="http://schemas.microsoft.com/office/powerpoint/2010/main" xmlns="" val="268289828"/>
       </p:ext>
     </p:extLst>
   </p:cSld>
@@ -1357,7 +1367,8 @@
           <a:p>
             <a:fld id="{D8F5507C-E303-491D-9BD5-658D9E88C63E}" type="datetimeFigureOut">
               <a:rPr lang="vi-VN" smtClean="0"/>
-              <a:t>06/07/2021</a:t>
+              <a:pPr/>
+              <a:t>20/08/2024</a:t>
             </a:fld>
             <a:endParaRPr lang="vi-VN"/>
           </a:p>
@@ -1399,6 +1410,7 @@
           <a:p>
             <a:fld id="{8A2132A0-C03C-4E0B-B580-F67C3BD9DEC7}" type="slidenum">
               <a:rPr lang="vi-VN" smtClean="0"/>
+              <a:pPr/>
               <a:t>‹#›</a:t>
             </a:fld>
             <a:endParaRPr lang="vi-VN"/>
@@ -1408,7 +1420,7 @@
     </p:spTree>
     <p:extLst>
       <p:ext uri="{BB962C8B-B14F-4D97-AF65-F5344CB8AC3E}">
-        <p14:creationId xmlns:p14="http://schemas.microsoft.com/office/powerpoint/2010/main" val="951684520"/>
+        <p14:creationId xmlns:p14="http://schemas.microsoft.com/office/powerpoint/2010/main" xmlns="" val="951684520"/>
       </p:ext>
     </p:extLst>
   </p:cSld>
@@ -1779,7 +1791,8 @@
           <a:p>
             <a:fld id="{D8F5507C-E303-491D-9BD5-658D9E88C63E}" type="datetimeFigureOut">
               <a:rPr lang="vi-VN" smtClean="0"/>
-              <a:t>06/07/2021</a:t>
+              <a:pPr/>
+              <a:t>20/08/2024</a:t>
             </a:fld>
             <a:endParaRPr lang="vi-VN"/>
           </a:p>
@@ -1821,6 +1834,7 @@
           <a:p>
             <a:fld id="{8A2132A0-C03C-4E0B-B580-F67C3BD9DEC7}" type="slidenum">
               <a:rPr lang="vi-VN" smtClean="0"/>
+              <a:pPr/>
               <a:t>‹#›</a:t>
             </a:fld>
             <a:endParaRPr lang="vi-VN"/>
@@ -1830,7 +1844,7 @@
     </p:spTree>
     <p:extLst>
       <p:ext uri="{BB962C8B-B14F-4D97-AF65-F5344CB8AC3E}">
-        <p14:creationId xmlns:p14="http://schemas.microsoft.com/office/powerpoint/2010/main" val="3701931900"/>
+        <p14:creationId xmlns:p14="http://schemas.microsoft.com/office/powerpoint/2010/main" xmlns="" val="3701931900"/>
       </p:ext>
     </p:extLst>
   </p:cSld>
@@ -1897,7 +1911,8 @@
           <a:p>
             <a:fld id="{D8F5507C-E303-491D-9BD5-658D9E88C63E}" type="datetimeFigureOut">
               <a:rPr lang="vi-VN" smtClean="0"/>
-              <a:t>06/07/2021</a:t>
+              <a:pPr/>
+              <a:t>20/08/2024</a:t>
             </a:fld>
             <a:endParaRPr lang="vi-VN"/>
           </a:p>
@@ -1939,6 +1954,7 @@
           <a:p>
             <a:fld id="{8A2132A0-C03C-4E0B-B580-F67C3BD9DEC7}" type="slidenum">
               <a:rPr lang="vi-VN" smtClean="0"/>
+              <a:pPr/>
               <a:t>‹#›</a:t>
             </a:fld>
             <a:endParaRPr lang="vi-VN"/>
@@ -1948,7 +1964,7 @@
     </p:spTree>
     <p:extLst>
       <p:ext uri="{BB962C8B-B14F-4D97-AF65-F5344CB8AC3E}">
-        <p14:creationId xmlns:p14="http://schemas.microsoft.com/office/powerpoint/2010/main" val="460946221"/>
+        <p14:creationId xmlns:p14="http://schemas.microsoft.com/office/powerpoint/2010/main" xmlns="" val="460946221"/>
       </p:ext>
     </p:extLst>
   </p:cSld>
@@ -1992,7 +2008,8 @@
           <a:p>
             <a:fld id="{D8F5507C-E303-491D-9BD5-658D9E88C63E}" type="datetimeFigureOut">
               <a:rPr lang="vi-VN" smtClean="0"/>
-              <a:t>06/07/2021</a:t>
+              <a:pPr/>
+              <a:t>20/08/2024</a:t>
             </a:fld>
             <a:endParaRPr lang="vi-VN"/>
           </a:p>
@@ -2034,6 +2051,7 @@
           <a:p>
             <a:fld id="{8A2132A0-C03C-4E0B-B580-F67C3BD9DEC7}" type="slidenum">
               <a:rPr lang="vi-VN" smtClean="0"/>
+              <a:pPr/>
               <a:t>‹#›</a:t>
             </a:fld>
             <a:endParaRPr lang="vi-VN"/>
@@ -2043,7 +2061,7 @@
     </p:spTree>
     <p:extLst>
       <p:ext uri="{BB962C8B-B14F-4D97-AF65-F5344CB8AC3E}">
-        <p14:creationId xmlns:p14="http://schemas.microsoft.com/office/powerpoint/2010/main" val="4216760951"/>
+        <p14:creationId xmlns:p14="http://schemas.microsoft.com/office/powerpoint/2010/main" xmlns="" val="4216760951"/>
       </p:ext>
     </p:extLst>
   </p:cSld>
@@ -2269,7 +2287,8 @@
           <a:p>
             <a:fld id="{D8F5507C-E303-491D-9BD5-658D9E88C63E}" type="datetimeFigureOut">
               <a:rPr lang="vi-VN" smtClean="0"/>
-              <a:t>06/07/2021</a:t>
+              <a:pPr/>
+              <a:t>20/08/2024</a:t>
             </a:fld>
             <a:endParaRPr lang="vi-VN"/>
           </a:p>
@@ -2311,6 +2330,7 @@
           <a:p>
             <a:fld id="{8A2132A0-C03C-4E0B-B580-F67C3BD9DEC7}" type="slidenum">
               <a:rPr lang="vi-VN" smtClean="0"/>
+              <a:pPr/>
               <a:t>‹#›</a:t>
             </a:fld>
             <a:endParaRPr lang="vi-VN"/>
@@ -2320,7 +2340,7 @@
     </p:spTree>
     <p:extLst>
       <p:ext uri="{BB962C8B-B14F-4D97-AF65-F5344CB8AC3E}">
-        <p14:creationId xmlns:p14="http://schemas.microsoft.com/office/powerpoint/2010/main" val="2446051611"/>
+        <p14:creationId xmlns:p14="http://schemas.microsoft.com/office/powerpoint/2010/main" xmlns="" val="2446051611"/>
       </p:ext>
     </p:extLst>
   </p:cSld>
@@ -2526,7 +2546,8 @@
           <a:p>
             <a:fld id="{D8F5507C-E303-491D-9BD5-658D9E88C63E}" type="datetimeFigureOut">
               <a:rPr lang="vi-VN" smtClean="0"/>
-              <a:t>06/07/2021</a:t>
+              <a:pPr/>
+              <a:t>20/08/2024</a:t>
             </a:fld>
             <a:endParaRPr lang="vi-VN"/>
           </a:p>
@@ -2568,6 +2589,7 @@
           <a:p>
             <a:fld id="{8A2132A0-C03C-4E0B-B580-F67C3BD9DEC7}" type="slidenum">
               <a:rPr lang="vi-VN" smtClean="0"/>
+              <a:pPr/>
               <a:t>‹#›</a:t>
             </a:fld>
             <a:endParaRPr lang="vi-VN"/>
@@ -2577,7 +2599,7 @@
     </p:spTree>
     <p:extLst>
       <p:ext uri="{BB962C8B-B14F-4D97-AF65-F5344CB8AC3E}">
-        <p14:creationId xmlns:p14="http://schemas.microsoft.com/office/powerpoint/2010/main" val="1168682176"/>
+        <p14:creationId xmlns:p14="http://schemas.microsoft.com/office/powerpoint/2010/main" xmlns="" val="1168682176"/>
       </p:ext>
     </p:extLst>
   </p:cSld>
@@ -2744,7 +2766,8 @@
           <a:p>
             <a:fld id="{D8F5507C-E303-491D-9BD5-658D9E88C63E}" type="datetimeFigureOut">
               <a:rPr lang="vi-VN" smtClean="0"/>
-              <a:t>06/07/2021</a:t>
+              <a:pPr/>
+              <a:t>20/08/2024</a:t>
             </a:fld>
             <a:endParaRPr lang="vi-VN"/>
           </a:p>
@@ -2822,6 +2845,7 @@
           <a:p>
             <a:fld id="{8A2132A0-C03C-4E0B-B580-F67C3BD9DEC7}" type="slidenum">
               <a:rPr lang="vi-VN" smtClean="0"/>
+              <a:pPr/>
               <a:t>‹#›</a:t>
             </a:fld>
             <a:endParaRPr lang="vi-VN"/>
@@ -2831,7 +2855,7 @@
     </p:spTree>
     <p:extLst>
       <p:ext uri="{BB962C8B-B14F-4D97-AF65-F5344CB8AC3E}">
-        <p14:creationId xmlns:p14="http://schemas.microsoft.com/office/powerpoint/2010/main" val="2729372710"/>
+        <p14:creationId xmlns:p14="http://schemas.microsoft.com/office/powerpoint/2010/main" xmlns="" val="2729372710"/>
       </p:ext>
     </p:extLst>
   </p:cSld>
@@ -3181,7 +3205,7 @@
     </p:spTree>
     <p:extLst>
       <p:ext uri="{BB962C8B-B14F-4D97-AF65-F5344CB8AC3E}">
-        <p14:creationId xmlns:p14="http://schemas.microsoft.com/office/powerpoint/2010/main" val="890596396"/>
+        <p14:creationId xmlns:p14="http://schemas.microsoft.com/office/powerpoint/2010/main" xmlns="" val="890596396"/>
       </p:ext>
     </p:extLst>
   </p:cSld>
@@ -3307,7 +3331,7 @@
     </p:spTree>
     <p:extLst>
       <p:ext uri="{BB962C8B-B14F-4D97-AF65-F5344CB8AC3E}">
-        <p14:creationId xmlns:p14="http://schemas.microsoft.com/office/powerpoint/2010/main" val="146169957"/>
+        <p14:creationId xmlns:p14="http://schemas.microsoft.com/office/powerpoint/2010/main" xmlns="" val="146169957"/>
       </p:ext>
     </p:extLst>
   </p:cSld>
@@ -3437,7 +3461,7 @@
     </p:spTree>
     <p:extLst>
       <p:ext uri="{BB962C8B-B14F-4D97-AF65-F5344CB8AC3E}">
-        <p14:creationId xmlns:p14="http://schemas.microsoft.com/office/powerpoint/2010/main" val="1740136093"/>
+        <p14:creationId xmlns:p14="http://schemas.microsoft.com/office/powerpoint/2010/main" xmlns="" val="1740136093"/>
       </p:ext>
     </p:extLst>
   </p:cSld>
@@ -3595,7 +3619,7 @@
     </p:spTree>
     <p:extLst>
       <p:ext uri="{BB962C8B-B14F-4D97-AF65-F5344CB8AC3E}">
-        <p14:creationId xmlns:p14="http://schemas.microsoft.com/office/powerpoint/2010/main" val="2460982393"/>
+        <p14:creationId xmlns:p14="http://schemas.microsoft.com/office/powerpoint/2010/main" xmlns="" val="2460982393"/>
       </p:ext>
     </p:extLst>
   </p:cSld>
@@ -3721,7 +3745,7 @@
     </p:spTree>
     <p:extLst>
       <p:ext uri="{BB962C8B-B14F-4D97-AF65-F5344CB8AC3E}">
-        <p14:creationId xmlns:p14="http://schemas.microsoft.com/office/powerpoint/2010/main" val="279167309"/>
+        <p14:creationId xmlns:p14="http://schemas.microsoft.com/office/powerpoint/2010/main" xmlns="" val="279167309"/>
       </p:ext>
     </p:extLst>
   </p:cSld>
@@ -3784,34 +3808,54 @@
               <a:t>袮</a:t>
             </a:r>
             <a:r>
-              <a:rPr lang="zh-TW" altLang="en-US" sz="6400" b="1" dirty="0">
+              <a:rPr lang="zh-TW" altLang="en-US" sz="6400" b="1" dirty="0" smtClean="0">
                 <a:solidFill>
                   <a:srgbClr val="660033"/>
                 </a:solidFill>
                 <a:latin typeface="微軟正黑體" pitchFamily="34" charset="-120"/>
                 <a:ea typeface="微軟正黑體" pitchFamily="34" charset="-120"/>
               </a:rPr>
-              <a:t>好</a:t>
-            </a:r>
-            <a:r>
-              <a:rPr lang="zh-TW" altLang="en-US" sz="6400" b="1" dirty="0" smtClean="0">
+              <a:t>好比</a:t>
+            </a:r>
+            <a:r>
+              <a:rPr lang="zh-CN" altLang="en-US" sz="6400" b="1" dirty="0" smtClean="0">
                 <a:solidFill>
                   <a:srgbClr val="660033"/>
                 </a:solidFill>
                 <a:latin typeface="微軟正黑體" pitchFamily="34" charset="-120"/>
                 <a:ea typeface="微軟正黑體" pitchFamily="34" charset="-120"/>
               </a:rPr>
-              <a:t>比</a:t>
-            </a:r>
-            <a:r>
-              <a:rPr lang="zh-CN" altLang="en-US" sz="6400" b="1" dirty="0">
+              <a:t>珍貴</a:t>
+            </a:r>
+            <a:r>
+              <a:rPr lang="zh-CN" altLang="en-US" sz="6400" b="1" dirty="0" smtClean="0">
                 <a:solidFill>
                   <a:srgbClr val="660033"/>
                 </a:solidFill>
                 <a:latin typeface="微軟正黑體" pitchFamily="34" charset="-120"/>
                 <a:ea typeface="微軟正黑體" pitchFamily="34" charset="-120"/>
               </a:rPr>
-              <a:t>貴重的珍寶</a:t>
+              <a:t>的</a:t>
+            </a:r>
+            <a:r>
+              <a:rPr lang="zh-CN" altLang="en-US" sz="6400" b="1" dirty="0">
+                <a:solidFill>
+                  <a:srgbClr val="660033"/>
+                </a:solidFill>
+                <a:latin typeface="微軟正黑體" pitchFamily="34" charset="-120"/>
+                <a:ea typeface="微軟正黑體" pitchFamily="34" charset="-120"/>
+              </a:rPr>
+              <a:t>珠</a:t>
+            </a:r>
+            <a:r>
+              <a:rPr lang="zh-CN" altLang="en-US" sz="6400" b="1" dirty="0" smtClean="0">
+                <a:solidFill>
+                  <a:srgbClr val="660033"/>
+                </a:solidFill>
+                <a:latin typeface="微軟正黑體" pitchFamily="34" charset="-120"/>
+                <a:ea typeface="微軟正黑體" pitchFamily="34" charset="-120"/>
+              </a:rPr>
+              <a:t>寶</a:t>
             </a:r>
             <a:endParaRPr lang="en-US" altLang="zh-TW" sz="6400" b="1" dirty="0">
               <a:solidFill>
@@ -3909,7 +3953,7 @@
     </p:spTree>
     <p:extLst>
       <p:ext uri="{BB962C8B-B14F-4D97-AF65-F5344CB8AC3E}">
-        <p14:creationId xmlns:p14="http://schemas.microsoft.com/office/powerpoint/2010/main" val="1854483334"/>
+        <p14:creationId xmlns:p14="http://schemas.microsoft.com/office/powerpoint/2010/main" xmlns="" val="1854483334"/>
       </p:ext>
     </p:extLst>
   </p:cSld>
@@ -4035,7 +4079,7 @@
     </p:spTree>
     <p:extLst>
       <p:ext uri="{BB962C8B-B14F-4D97-AF65-F5344CB8AC3E}">
-        <p14:creationId xmlns:p14="http://schemas.microsoft.com/office/powerpoint/2010/main" val="2527609445"/>
+        <p14:creationId xmlns:p14="http://schemas.microsoft.com/office/powerpoint/2010/main" xmlns="" val="2527609445"/>
       </p:ext>
     </p:extLst>
   </p:cSld>
@@ -4165,7 +4209,7 @@
     </p:spTree>
     <p:extLst>
       <p:ext uri="{BB962C8B-B14F-4D97-AF65-F5344CB8AC3E}">
-        <p14:creationId xmlns:p14="http://schemas.microsoft.com/office/powerpoint/2010/main" val="2757792555"/>
+        <p14:creationId xmlns:p14="http://schemas.microsoft.com/office/powerpoint/2010/main" xmlns="" val="2757792555"/>
       </p:ext>
     </p:extLst>
   </p:cSld>
@@ -4303,7 +4347,7 @@
     </p:spTree>
     <p:extLst>
       <p:ext uri="{BB962C8B-B14F-4D97-AF65-F5344CB8AC3E}">
-        <p14:creationId xmlns:p14="http://schemas.microsoft.com/office/powerpoint/2010/main" val="3557452774"/>
+        <p14:creationId xmlns:p14="http://schemas.microsoft.com/office/powerpoint/2010/main" xmlns="" val="3557452774"/>
       </p:ext>
     </p:extLst>
   </p:cSld>
@@ -4429,7 +4473,7 @@
     </p:spTree>
     <p:extLst>
       <p:ext uri="{BB962C8B-B14F-4D97-AF65-F5344CB8AC3E}">
-        <p14:creationId xmlns:p14="http://schemas.microsoft.com/office/powerpoint/2010/main" val="3103102236"/>
+        <p14:creationId xmlns:p14="http://schemas.microsoft.com/office/powerpoint/2010/main" xmlns="" val="3103102236"/>
       </p:ext>
     </p:extLst>
   </p:cSld>
@@ -4502,14 +4546,14 @@
               <a:t>我</a:t>
             </a:r>
             <a:r>
-              <a:rPr lang="zh-CN" altLang="en-US" sz="6400" b="1" dirty="0" smtClean="0">
+              <a:rPr lang="zh-CN" altLang="en-US" sz="6400" b="1" smtClean="0">
                 <a:solidFill>
                   <a:srgbClr val="660033"/>
                 </a:solidFill>
                 <a:latin typeface="微軟正黑體" pitchFamily="34" charset="-120"/>
                 <a:ea typeface="微軟正黑體" pitchFamily="34" charset="-120"/>
               </a:rPr>
-              <a:t>失</a:t>
+              <a:t>跌倒</a:t>
             </a:r>
             <a:r>
               <a:rPr lang="zh-CN" altLang="en-US" sz="6400" b="1" smtClean="0">
@@ -4519,7 +4563,17 @@
                 <a:latin typeface="微軟正黑體" pitchFamily="34" charset="-120"/>
                 <a:ea typeface="微軟正黑體" pitchFamily="34" charset="-120"/>
               </a:rPr>
-              <a:t>腳袮扶</a:t>
+              <a:t>袮</a:t>
+            </a:r>
+            <a:r>
+              <a:rPr lang="zh-CN" altLang="en-US" sz="6400" b="1" smtClean="0">
+                <a:solidFill>
+                  <a:srgbClr val="660033"/>
+                </a:solidFill>
+                <a:latin typeface="微軟正黑體" pitchFamily="34" charset="-120"/>
+                <a:ea typeface="微軟正黑體" pitchFamily="34" charset="-120"/>
+              </a:rPr>
+              <a:t>扶</a:t>
             </a:r>
             <a:r>
               <a:rPr lang="zh-CN" altLang="en-US" sz="6400" b="1" dirty="0" smtClean="0">
@@ -4637,7 +4691,7 @@
     </p:spTree>
     <p:extLst>
       <p:ext uri="{BB962C8B-B14F-4D97-AF65-F5344CB8AC3E}">
-        <p14:creationId xmlns:p14="http://schemas.microsoft.com/office/powerpoint/2010/main" val="1717197344"/>
+        <p14:creationId xmlns:p14="http://schemas.microsoft.com/office/powerpoint/2010/main" xmlns="" val="1717197344"/>
       </p:ext>
     </p:extLst>
   </p:cSld>
@@ -4929,7 +4983,7 @@
   <a:extraClrSchemeLst/>
   <a:extLst>
     <a:ext uri="{05A4C25C-085E-4340-85A3-A5531E510DB2}">
-      <thm15:themeFamily xmlns:thm15="http://schemas.microsoft.com/office/thememl/2012/main" name="Theme1" id="{1A8DE197-990E-4893-BF04-3823FBB50F9A}" vid="{430B7048-5A04-4BDB-939A-C7E865DB887B}"/>
+      <thm15:themeFamily xmlns:thm15="http://schemas.microsoft.com/office/thememl/2012/main" xmlns="" name="Theme1" id="{1A8DE197-990E-4893-BF04-3823FBB50F9A}" vid="{430B7048-5A04-4BDB-939A-C7E865DB887B}"/>
     </a:ext>
   </a:extLst>
 </a:theme>
